--- a/public/fun/cards/care/care-32.pptx
+++ b/public/fun/cards/care/care-32.pptx
@@ -3085,7 +3085,7 @@
     <p:bg>
       <p:bgPr>
         <a:solidFill>
-          <a:srgbClr val="EFF5FA"/>
+          <a:srgbClr val="FFFFFF"/>
         </a:solidFill>
         <a:effectLst/>
       </p:bgPr>
@@ -3099,14 +3099,43 @@
       <p:grpSpPr/>
       <p:sp>
         <p:nvSpPr>
-          <p:cNvPr id="2" name="텍스트"/>
+          <p:cNvPr id="2" name="Rectangle 1"/>
+          <p:cNvSpPr/>
+          <p:nvPr/>
+        </p:nvSpPr>
+        <p:spPr>
+          <a:xfrm>
+            <a:off x="252000" y="144000"/>
+            <a:ext cx="201600" cy="21600"/>
+          </a:xfrm>
+          <a:prstGeom prst="rect">
+            <a:avLst/>
+          </a:prstGeom>
+          <a:solidFill>
+            <a:srgbClr val="FF2E93"/>
+          </a:solidFill>
+          <a:ln>
+            <a:noFill/>
+          </a:ln>
+        </p:spPr>
+        <p:txBody>
+          <a:bodyPr rtlCol="0" anchor="ctr"/>
+          <a:lstStyle/>
+          <a:p>
+            <a:pPr algn="ctr"/>
+          </a:p>
+        </p:txBody>
+      </p:sp>
+      <p:sp>
+        <p:nvSpPr>
+          <p:cNvPr id="3" name="텍스트"/>
           <p:cNvSpPr txBox="1"/>
           <p:nvPr/>
         </p:nvSpPr>
         <p:spPr>
           <a:xfrm>
-            <a:off x="360000" y="201600"/>
-            <a:ext cx="2520000" cy="100800"/>
+            <a:off x="252000" y="273600"/>
+            <a:ext cx="2160000" cy="360000"/>
           </a:xfrm>
           <a:prstGeom prst="rect">
             <a:avLst/>
@@ -3119,84 +3148,34 @@
           </a:bodyPr>
           <a:lstStyle/>
           <a:p>
-            <a:pPr algn="ctr">
+            <a:pPr algn="l">
               <a:lnSpc>
-                <a:spcPts val="1015"/>
+                <a:spcPts val="3190"/>
               </a:lnSpc>
             </a:pPr>
             <a:r>
-              <a:rPr sz="700" b="1" spc="300">
+              <a:rPr sz="2200" b="1">
                 <a:solidFill>
-                  <a:srgbClr val="5F7180"/>
+                  <a:srgbClr val="12151C"/>
                 </a:solidFill>
                 <a:latin typeface="맑은 고딕"/>
                 <a:ea typeface="맑은 고딕"/>
               </a:rPr>
-              <a:t>의원 · 약국 이름</a:t>
-            </a:r>
-          </a:p>
-        </p:txBody>
-      </p:sp>
-      <p:sp>
-        <p:nvSpPr>
-          <p:cNvPr id="3" name="Oval 2"/>
-          <p:cNvSpPr/>
-          <p:nvPr/>
-        </p:nvSpPr>
-        <p:spPr>
-          <a:xfrm rot="2280000">
-            <a:off x="1572480" y="413280"/>
-            <a:ext cx="95040" cy="181440"/>
-          </a:xfrm>
-          <a:prstGeom prst="ellipse">
-            <a:avLst/>
-          </a:prstGeom>
-          <a:solidFill>
-            <a:srgbClr val="275A86"/>
-          </a:solidFill>
-          <a:ln>
-            <a:noFill/>
-          </a:ln>
-        </p:spPr>
-        <p:txBody>
-          <a:bodyPr rtlCol="0" anchor="ctr"/>
-          <a:lstStyle/>
-          <a:p>
-            <a:pPr algn="ctr"/>
-          </a:p>
-        </p:txBody>
-      </p:sp>
-      <p:cxnSp>
-        <p:nvCxnSpPr>
-          <p:cNvPr id="4" name="Connector 3"/>
-          <p:cNvCxnSpPr/>
-          <p:nvPr/>
-        </p:nvCxnSpPr>
-        <p:spPr>
-          <a:xfrm flipV="1">
-            <a:off x="1563840" y="439200"/>
-            <a:ext cx="108000" cy="129600"/>
-          </a:xfrm>
-          <a:prstGeom prst="line">
-            <a:avLst/>
-          </a:prstGeom>
-          <a:ln w="8640">
-            <a:solidFill>
-              <a:srgbClr val="DDEBF7"/>
-            </a:solidFill>
-          </a:ln>
-        </p:spPr>
-      </p:cxnSp>
-      <p:sp>
-        <p:nvSpPr>
-          <p:cNvPr id="5" name="텍스트"/>
+              <a:t>구민아</a:t>
+            </a:r>
+          </a:p>
+        </p:txBody>
+      </p:sp>
+      <p:sp>
+        <p:nvSpPr>
+          <p:cNvPr id="4" name="텍스트"/>
           <p:cNvSpPr txBox="1"/>
           <p:nvPr/>
         </p:nvSpPr>
         <p:spPr>
           <a:xfrm>
-            <a:off x="360000" y="684000"/>
-            <a:ext cx="2520000" cy="313692"/>
+            <a:off x="252000" y="676800"/>
+            <a:ext cx="2160000" cy="171451"/>
           </a:xfrm>
           <a:prstGeom prst="rect">
             <a:avLst/>
@@ -3209,34 +3188,34 @@
           </a:bodyPr>
           <a:lstStyle/>
           <a:p>
-            <a:pPr algn="ctr">
+            <a:pPr algn="l">
               <a:lnSpc>
-                <a:spcPts val="2755"/>
+                <a:spcPts val="1305"/>
               </a:lnSpc>
             </a:pPr>
             <a:r>
-              <a:rPr sz="1900" b="1" spc="50">
+              <a:rPr sz="900" b="0">
                 <a:solidFill>
-                  <a:srgbClr val="122A3F"/>
+                  <a:srgbClr val="6B7280"/>
                 </a:solidFill>
                 <a:latin typeface="맑은 고딕"/>
                 <a:ea typeface="맑은 고딕"/>
               </a:rPr>
-              <a:t>구민아</a:t>
-            </a:r>
-          </a:p>
-        </p:txBody>
-      </p:sp>
-      <p:sp>
-        <p:nvSpPr>
-          <p:cNvPr id="6" name="텍스트"/>
+              <a:t>약사</a:t>
+            </a:r>
+          </a:p>
+        </p:txBody>
+      </p:sp>
+      <p:sp>
+        <p:nvSpPr>
+          <p:cNvPr id="5" name="텍스트"/>
           <p:cNvSpPr txBox="1"/>
           <p:nvPr/>
         </p:nvSpPr>
         <p:spPr>
           <a:xfrm>
-            <a:off x="360000" y="1051200"/>
-            <a:ext cx="2520000" cy="122400"/>
+            <a:off x="1548000" y="230400"/>
+            <a:ext cx="1440000" cy="123826"/>
           </a:xfrm>
           <a:prstGeom prst="rect">
             <a:avLst/>
@@ -3249,63 +3228,55 @@
           </a:bodyPr>
           <a:lstStyle/>
           <a:p>
-            <a:pPr algn="ctr">
+            <a:pPr algn="r">
               <a:lnSpc>
-                <a:spcPts val="1232"/>
+                <a:spcPts val="942"/>
               </a:lnSpc>
             </a:pPr>
             <a:r>
-              <a:rPr sz="850" b="1">
+              <a:rPr sz="650" b="1" spc="200">
                 <a:solidFill>
-                  <a:srgbClr val="275A86"/>
+                  <a:srgbClr val="6B7280"/>
                 </a:solidFill>
                 <a:latin typeface="맑은 고딕"/>
                 <a:ea typeface="맑은 고딕"/>
               </a:rPr>
-              <a:t>약사</a:t>
-            </a:r>
-          </a:p>
-        </p:txBody>
-      </p:sp>
-      <p:sp>
-        <p:nvSpPr>
-          <p:cNvPr id="7" name="Rectangle 6"/>
-          <p:cNvSpPr/>
+              <a:t>의원 · 약국 이름</a:t>
+            </a:r>
+          </a:p>
+        </p:txBody>
+      </p:sp>
+      <p:cxnSp>
+        <p:nvCxnSpPr>
+          <p:cNvPr id="6" name="Connector 5"/>
+          <p:cNvCxnSpPr/>
           <p:nvPr/>
-        </p:nvSpPr>
+        </p:nvCxnSpPr>
         <p:spPr>
           <a:xfrm>
-            <a:off x="1512000" y="1245600"/>
-            <a:ext cx="216000" cy="10800"/>
+            <a:off x="252000" y="1051200"/>
+            <a:ext cx="2736000" cy="0"/>
           </a:xfrm>
-          <a:prstGeom prst="rect">
+          <a:prstGeom prst="line">
             <a:avLst/>
           </a:prstGeom>
-          <a:solidFill>
-            <a:srgbClr val="275A86"/>
-          </a:solidFill>
-          <a:ln>
-            <a:noFill/>
+          <a:ln w="5760">
+            <a:solidFill>
+              <a:srgbClr val="E3E5E9"/>
+            </a:solidFill>
           </a:ln>
         </p:spPr>
-        <p:txBody>
-          <a:bodyPr rtlCol="0" anchor="ctr"/>
-          <a:lstStyle/>
-          <a:p>
-            <a:pPr algn="ctr"/>
-          </a:p>
-        </p:txBody>
-      </p:sp>
-      <p:sp>
-        <p:nvSpPr>
-          <p:cNvPr id="8" name="텍스트"/>
+      </p:cxnSp>
+      <p:sp>
+        <p:nvSpPr>
+          <p:cNvPr id="7" name="텍스트"/>
           <p:cNvSpPr txBox="1"/>
           <p:nvPr/>
         </p:nvSpPr>
         <p:spPr>
           <a:xfrm>
-            <a:off x="360000" y="1339200"/>
-            <a:ext cx="2520000" cy="108000"/>
+            <a:off x="252000" y="1123200"/>
+            <a:ext cx="576000" cy="99061"/>
           </a:xfrm>
           <a:prstGeom prst="rect">
             <a:avLst/>
@@ -3318,34 +3289,34 @@
           </a:bodyPr>
           <a:lstStyle/>
           <a:p>
-            <a:pPr algn="ctr">
+            <a:pPr algn="l">
               <a:lnSpc>
-                <a:spcPts val="1015"/>
+                <a:spcPts val="754"/>
               </a:lnSpc>
             </a:pPr>
             <a:r>
-              <a:rPr sz="700" b="0">
+              <a:rPr sz="520" b="1" spc="150">
                 <a:solidFill>
-                  <a:srgbClr val="122A3F"/>
+                  <a:srgbClr val="6B7280"/>
                 </a:solidFill>
                 <a:latin typeface="맑은 고딕"/>
                 <a:ea typeface="맑은 고딕"/>
               </a:rPr>
-              <a:t>010-1234-5678   ·   name@example.com</a:t>
-            </a:r>
-          </a:p>
-        </p:txBody>
-      </p:sp>
-      <p:sp>
-        <p:nvSpPr>
-          <p:cNvPr id="9" name="텍스트"/>
+              <a:t>TEL</a:t>
+            </a:r>
+          </a:p>
+        </p:txBody>
+      </p:sp>
+      <p:sp>
+        <p:nvSpPr>
+          <p:cNvPr id="8" name="텍스트"/>
           <p:cNvSpPr txBox="1"/>
           <p:nvPr/>
         </p:nvSpPr>
         <p:spPr>
           <a:xfrm>
-            <a:off x="360000" y="1468800"/>
-            <a:ext cx="2520000" cy="108000"/>
+            <a:off x="900000" y="1101600"/>
+            <a:ext cx="2088000" cy="142876"/>
           </a:xfrm>
           <a:prstGeom prst="rect">
             <a:avLst/>
@@ -3358,15 +3329,217 @@
           </a:bodyPr>
           <a:lstStyle/>
           <a:p>
-            <a:pPr algn="ctr">
+            <a:pPr algn="l">
               <a:lnSpc>
-                <a:spcPts val="1015"/>
+                <a:spcPts val="1087"/>
               </a:lnSpc>
             </a:pPr>
             <a:r>
-              <a:rPr sz="700" b="0">
+              <a:rPr sz="750" b="0">
                 <a:solidFill>
-                  <a:srgbClr val="5F7180"/>
+                  <a:srgbClr val="12151C"/>
+                </a:solidFill>
+                <a:latin typeface="맑은 고딕"/>
+                <a:ea typeface="맑은 고딕"/>
+              </a:rPr>
+              <a:t>010-1234-5678</a:t>
+            </a:r>
+          </a:p>
+        </p:txBody>
+      </p:sp>
+      <p:cxnSp>
+        <p:nvCxnSpPr>
+          <p:cNvPr id="9" name="Connector 8"/>
+          <p:cNvCxnSpPr/>
+          <p:nvPr/>
+        </p:nvCxnSpPr>
+        <p:spPr>
+          <a:xfrm>
+            <a:off x="252000" y="1274400"/>
+            <a:ext cx="2736000" cy="0"/>
+          </a:xfrm>
+          <a:prstGeom prst="line">
+            <a:avLst/>
+          </a:prstGeom>
+          <a:ln w="5760">
+            <a:solidFill>
+              <a:srgbClr val="E3E5E9"/>
+            </a:solidFill>
+          </a:ln>
+        </p:spPr>
+      </p:cxnSp>
+      <p:sp>
+        <p:nvSpPr>
+          <p:cNvPr id="10" name="텍스트"/>
+          <p:cNvSpPr txBox="1"/>
+          <p:nvPr/>
+        </p:nvSpPr>
+        <p:spPr>
+          <a:xfrm>
+            <a:off x="252000" y="1346400"/>
+            <a:ext cx="576000" cy="99061"/>
+          </a:xfrm>
+          <a:prstGeom prst="rect">
+            <a:avLst/>
+          </a:prstGeom>
+          <a:noFill/>
+        </p:spPr>
+        <p:txBody>
+          <a:bodyPr wrap="square" lIns="0" rIns="0" tIns="0" bIns="0" anchor="t">
+            <a:spAutoFit/>
+          </a:bodyPr>
+          <a:lstStyle/>
+          <a:p>
+            <a:pPr algn="l">
+              <a:lnSpc>
+                <a:spcPts val="754"/>
+              </a:lnSpc>
+            </a:pPr>
+            <a:r>
+              <a:rPr sz="520" b="1" spc="150">
+                <a:solidFill>
+                  <a:srgbClr val="6B7280"/>
+                </a:solidFill>
+                <a:latin typeface="맑은 고딕"/>
+                <a:ea typeface="맑은 고딕"/>
+              </a:rPr>
+              <a:t>MAIL</a:t>
+            </a:r>
+          </a:p>
+        </p:txBody>
+      </p:sp>
+      <p:sp>
+        <p:nvSpPr>
+          <p:cNvPr id="11" name="텍스트"/>
+          <p:cNvSpPr txBox="1"/>
+          <p:nvPr/>
+        </p:nvSpPr>
+        <p:spPr>
+          <a:xfrm>
+            <a:off x="900000" y="1324800"/>
+            <a:ext cx="2088000" cy="142876"/>
+          </a:xfrm>
+          <a:prstGeom prst="rect">
+            <a:avLst/>
+          </a:prstGeom>
+          <a:noFill/>
+        </p:spPr>
+        <p:txBody>
+          <a:bodyPr wrap="square" lIns="0" rIns="0" tIns="0" bIns="0" anchor="t">
+            <a:spAutoFit/>
+          </a:bodyPr>
+          <a:lstStyle/>
+          <a:p>
+            <a:pPr algn="l">
+              <a:lnSpc>
+                <a:spcPts val="1087"/>
+              </a:lnSpc>
+            </a:pPr>
+            <a:r>
+              <a:rPr sz="750" b="0">
+                <a:solidFill>
+                  <a:srgbClr val="12151C"/>
+                </a:solidFill>
+                <a:latin typeface="맑은 고딕"/>
+                <a:ea typeface="맑은 고딕"/>
+              </a:rPr>
+              <a:t>name@example.com</a:t>
+            </a:r>
+          </a:p>
+        </p:txBody>
+      </p:sp>
+      <p:cxnSp>
+        <p:nvCxnSpPr>
+          <p:cNvPr id="12" name="Connector 11"/>
+          <p:cNvCxnSpPr/>
+          <p:nvPr/>
+        </p:nvCxnSpPr>
+        <p:spPr>
+          <a:xfrm>
+            <a:off x="252000" y="1497600"/>
+            <a:ext cx="2736000" cy="0"/>
+          </a:xfrm>
+          <a:prstGeom prst="line">
+            <a:avLst/>
+          </a:prstGeom>
+          <a:ln w="5760">
+            <a:solidFill>
+              <a:srgbClr val="E3E5E9"/>
+            </a:solidFill>
+          </a:ln>
+        </p:spPr>
+      </p:cxnSp>
+      <p:sp>
+        <p:nvSpPr>
+          <p:cNvPr id="13" name="텍스트"/>
+          <p:cNvSpPr txBox="1"/>
+          <p:nvPr/>
+        </p:nvSpPr>
+        <p:spPr>
+          <a:xfrm>
+            <a:off x="252000" y="1569600"/>
+            <a:ext cx="576000" cy="99061"/>
+          </a:xfrm>
+          <a:prstGeom prst="rect">
+            <a:avLst/>
+          </a:prstGeom>
+          <a:noFill/>
+        </p:spPr>
+        <p:txBody>
+          <a:bodyPr wrap="square" lIns="0" rIns="0" tIns="0" bIns="0" anchor="t">
+            <a:spAutoFit/>
+          </a:bodyPr>
+          <a:lstStyle/>
+          <a:p>
+            <a:pPr algn="l">
+              <a:lnSpc>
+                <a:spcPts val="754"/>
+              </a:lnSpc>
+            </a:pPr>
+            <a:r>
+              <a:rPr sz="520" b="1" spc="150">
+                <a:solidFill>
+                  <a:srgbClr val="6B7280"/>
+                </a:solidFill>
+                <a:latin typeface="맑은 고딕"/>
+                <a:ea typeface="맑은 고딕"/>
+              </a:rPr>
+              <a:t>ADDR</a:t>
+            </a:r>
+          </a:p>
+        </p:txBody>
+      </p:sp>
+      <p:sp>
+        <p:nvSpPr>
+          <p:cNvPr id="14" name="텍스트"/>
+          <p:cNvSpPr txBox="1"/>
+          <p:nvPr/>
+        </p:nvSpPr>
+        <p:spPr>
+          <a:xfrm>
+            <a:off x="900000" y="1548000"/>
+            <a:ext cx="2088000" cy="142876"/>
+          </a:xfrm>
+          <a:prstGeom prst="rect">
+            <a:avLst/>
+          </a:prstGeom>
+          <a:noFill/>
+        </p:spPr>
+        <p:txBody>
+          <a:bodyPr wrap="square" lIns="0" rIns="0" tIns="0" bIns="0" anchor="t">
+            <a:spAutoFit/>
+          </a:bodyPr>
+          <a:lstStyle/>
+          <a:p>
+            <a:pPr algn="l">
+              <a:lnSpc>
+                <a:spcPts val="1087"/>
+              </a:lnSpc>
+            </a:pPr>
+            <a:r>
+              <a:rPr sz="750" b="0">
+                <a:solidFill>
+                  <a:srgbClr val="12151C"/>
                 </a:solidFill>
                 <a:latin typeface="맑은 고딕"/>
                 <a:ea typeface="맑은 고딕"/>
@@ -3376,6 +3549,27 @@
           </a:p>
         </p:txBody>
       </p:sp>
+      <p:cxnSp>
+        <p:nvCxnSpPr>
+          <p:cNvPr id="15" name="Connector 14"/>
+          <p:cNvCxnSpPr/>
+          <p:nvPr/>
+        </p:nvCxnSpPr>
+        <p:spPr>
+          <a:xfrm>
+            <a:off x="252000" y="1720800"/>
+            <a:ext cx="2736000" cy="0"/>
+          </a:xfrm>
+          <a:prstGeom prst="line">
+            <a:avLst/>
+          </a:prstGeom>
+          <a:ln w="5760">
+            <a:solidFill>
+              <a:srgbClr val="E3E5E9"/>
+            </a:solidFill>
+          </a:ln>
+        </p:spPr>
+      </p:cxnSp>
     </p:spTree>
   </p:cSld>
   <p:clrMapOvr>
@@ -3390,7 +3584,7 @@
     <p:bg>
       <p:bgPr>
         <a:solidFill>
-          <a:srgbClr val="EFF5FA"/>
+          <a:srgbClr val="0E1116"/>
         </a:solidFill>
         <a:effectLst/>
       </p:bgPr>
@@ -3410,17 +3604,18 @@
         </p:nvSpPr>
         <p:spPr>
           <a:xfrm>
-            <a:off x="0" y="0"/>
-            <a:ext cx="273600" cy="1800000"/>
+            <a:off x="2304000" y="504000"/>
+            <a:ext cx="684000" cy="684000"/>
           </a:xfrm>
           <a:prstGeom prst="rect">
             <a:avLst/>
           </a:prstGeom>
-          <a:solidFill>
-            <a:srgbClr val="275A86"/>
-          </a:solidFill>
-          <a:ln>
-            <a:noFill/>
+          <a:noFill/>
+          <a:ln w="7200">
+            <a:solidFill>
+              <a:srgbClr val="A3A9B5"/>
+            </a:solidFill>
+            <a:prstDash val="dash"/>
           </a:ln>
         </p:spPr>
         <p:txBody>
@@ -3433,64 +3628,14 @@
       </p:sp>
       <p:sp>
         <p:nvSpPr>
-          <p:cNvPr id="3" name="Oval 2"/>
-          <p:cNvSpPr/>
-          <p:nvPr/>
-        </p:nvSpPr>
-        <p:spPr>
-          <a:xfrm rot="2280000">
-            <a:off x="101952" y="171072"/>
-            <a:ext cx="69696" cy="133056"/>
-          </a:xfrm>
-          <a:prstGeom prst="ellipse">
-            <a:avLst/>
-          </a:prstGeom>
-          <a:solidFill>
-            <a:srgbClr val="FFFFFF"/>
-          </a:solidFill>
-          <a:ln>
-            <a:noFill/>
-          </a:ln>
-        </p:spPr>
-        <p:txBody>
-          <a:bodyPr rtlCol="0" anchor="ctr"/>
-          <a:lstStyle/>
-          <a:p>
-            <a:pPr algn="ctr"/>
-          </a:p>
-        </p:txBody>
-      </p:sp>
-      <p:cxnSp>
-        <p:nvCxnSpPr>
-          <p:cNvPr id="4" name="Connector 3"/>
-          <p:cNvCxnSpPr/>
-          <p:nvPr/>
-        </p:nvCxnSpPr>
-        <p:spPr>
-          <a:xfrm flipV="1">
-            <a:off x="95616" y="190080"/>
-            <a:ext cx="79200" cy="95040"/>
-          </a:xfrm>
-          <a:prstGeom prst="line">
-            <a:avLst/>
-          </a:prstGeom>
-          <a:ln w="6336">
-            <a:solidFill>
-              <a:srgbClr val="808080"/>
-            </a:solidFill>
-          </a:ln>
-        </p:spPr>
-      </p:cxnSp>
-      <p:sp>
-        <p:nvSpPr>
-          <p:cNvPr id="5" name="텍스트"/>
+          <p:cNvPr id="3" name="텍스트"/>
           <p:cNvSpPr txBox="1"/>
           <p:nvPr/>
         </p:nvSpPr>
         <p:spPr>
           <a:xfrm>
-            <a:off x="504000" y="396000"/>
-            <a:ext cx="1800000" cy="720000"/>
+            <a:off x="2304000" y="504000"/>
+            <a:ext cx="684000" cy="684000"/>
           </a:xfrm>
           <a:prstGeom prst="rect">
             <a:avLst/>
@@ -3503,51 +3648,34 @@
           </a:bodyPr>
           <a:lstStyle/>
           <a:p>
-            <a:pPr algn="l">
+            <a:pPr algn="ctr">
               <a:lnSpc>
-                <a:spcPts val="1667"/>
+                <a:spcPts val="1595"/>
               </a:lnSpc>
             </a:pPr>
             <a:r>
-              <a:rPr sz="1150" b="1">
+              <a:rPr sz="1100" b="1">
                 <a:solidFill>
-                  <a:srgbClr val="122A3F"/>
+                  <a:srgbClr val="A3A9B5"/>
                 </a:solidFill>
                 <a:latin typeface="맑은 고딕"/>
                 <a:ea typeface="맑은 고딕"/>
               </a:rPr>
-              <a:t>어르신의 이야기에</a:t>
-            </a:r>
-          </a:p>
-          <a:p>
-            <a:pPr algn="l">
-              <a:lnSpc>
-                <a:spcPts val="1667"/>
-              </a:lnSpc>
-            </a:pPr>
-            <a:r>
-              <a:rPr sz="1150" b="1">
-                <a:solidFill>
-                  <a:srgbClr val="122A3F"/>
-                </a:solidFill>
-                <a:latin typeface="맑은 고딕"/>
-                <a:ea typeface="맑은 고딕"/>
-              </a:rPr>
-              <a:t>귀 기울입니다</a:t>
-            </a:r>
-          </a:p>
-        </p:txBody>
-      </p:sp>
-      <p:sp>
-        <p:nvSpPr>
-          <p:cNvPr id="6" name="텍스트"/>
+              <a:t>QR</a:t>
+            </a:r>
+          </a:p>
+        </p:txBody>
+      </p:sp>
+      <p:sp>
+        <p:nvSpPr>
+          <p:cNvPr id="4" name="텍스트"/>
           <p:cNvSpPr txBox="1"/>
           <p:nvPr/>
         </p:nvSpPr>
         <p:spPr>
           <a:xfrm>
-            <a:off x="504000" y="1260000"/>
-            <a:ext cx="1728000" cy="108000"/>
+            <a:off x="252000" y="504000"/>
+            <a:ext cx="1728000" cy="720000"/>
           </a:xfrm>
           <a:prstGeom prst="rect">
             <a:avLst/>
@@ -3562,42 +3690,58 @@
           <a:p>
             <a:pPr algn="l">
               <a:lnSpc>
-                <a:spcPts val="1087"/>
+                <a:spcPts val="1739"/>
               </a:lnSpc>
             </a:pPr>
             <a:r>
-              <a:rPr sz="750" b="1" spc="200">
+              <a:rPr sz="1200" b="1">
                 <a:solidFill>
-                  <a:srgbClr val="5F7180"/>
+                  <a:srgbClr val="FFFFFF"/>
                 </a:solidFill>
                 <a:latin typeface="맑은 고딕"/>
                 <a:ea typeface="맑은 고딕"/>
               </a:rPr>
-              <a:t>의원 · 약국 이름</a:t>
-            </a:r>
-          </a:p>
-        </p:txBody>
-      </p:sp>
-      <p:sp>
-        <p:nvSpPr>
-          <p:cNvPr id="7" name="Rectangle 6"/>
+              <a:t>어르신의 이야기에</a:t>
+            </a:r>
+          </a:p>
+          <a:p>
+            <a:pPr algn="l">
+              <a:lnSpc>
+                <a:spcPts val="1739"/>
+              </a:lnSpc>
+            </a:pPr>
+            <a:r>
+              <a:rPr sz="1200" b="1">
+                <a:solidFill>
+                  <a:srgbClr val="FFFFFF"/>
+                </a:solidFill>
+                <a:latin typeface="맑은 고딕"/>
+                <a:ea typeface="맑은 고딕"/>
+              </a:rPr>
+              <a:t>귀 기울입니다</a:t>
+            </a:r>
+          </a:p>
+        </p:txBody>
+      </p:sp>
+      <p:sp>
+        <p:nvSpPr>
+          <p:cNvPr id="5" name="Rectangle 4"/>
           <p:cNvSpPr/>
           <p:nvPr/>
         </p:nvSpPr>
         <p:spPr>
           <a:xfrm>
-            <a:off x="2520000" y="216000"/>
-            <a:ext cx="468000" cy="468000"/>
+            <a:off x="252000" y="1296000"/>
+            <a:ext cx="144000" cy="18000"/>
           </a:xfrm>
           <a:prstGeom prst="rect">
             <a:avLst/>
           </a:prstGeom>
-          <a:noFill/>
-          <a:ln w="9000">
-            <a:solidFill>
-              <a:srgbClr val="275A86"/>
-            </a:solidFill>
-            <a:prstDash val="dash"/>
+          <a:solidFill>
+            <a:srgbClr val="FF2E93"/>
+          </a:solidFill>
+          <a:ln>
+            <a:noFill/>
           </a:ln>
         </p:spPr>
         <p:txBody>
@@ -3610,14 +3754,14 @@
       </p:sp>
       <p:sp>
         <p:nvSpPr>
-          <p:cNvPr id="8" name="텍스트"/>
+          <p:cNvPr id="6" name="텍스트"/>
           <p:cNvSpPr txBox="1"/>
           <p:nvPr/>
         </p:nvSpPr>
         <p:spPr>
           <a:xfrm>
-            <a:off x="2520000" y="216000"/>
-            <a:ext cx="468000" cy="468000"/>
+            <a:off x="252000" y="1404000"/>
+            <a:ext cx="1656000" cy="133351"/>
           </a:xfrm>
           <a:prstGeom prst="rect">
             <a:avLst/>
@@ -3625,25 +3769,25 @@
           <a:noFill/>
         </p:spPr>
         <p:txBody>
-          <a:bodyPr wrap="square" lIns="0" rIns="0" tIns="0" bIns="0" anchor="ctr">
+          <a:bodyPr wrap="square" lIns="0" rIns="0" tIns="0" bIns="0" anchor="t">
             <a:spAutoFit/>
           </a:bodyPr>
           <a:lstStyle/>
           <a:p>
-            <a:pPr algn="ctr">
+            <a:pPr algn="l">
               <a:lnSpc>
-                <a:spcPts val="1305"/>
+                <a:spcPts val="1015"/>
               </a:lnSpc>
             </a:pPr>
             <a:r>
-              <a:rPr sz="900" b="1">
+              <a:rPr sz="700" b="1" spc="200">
                 <a:solidFill>
-                  <a:srgbClr val="5F7180"/>
+                  <a:srgbClr val="A3A9B5"/>
                 </a:solidFill>
                 <a:latin typeface="맑은 고딕"/>
                 <a:ea typeface="맑은 고딕"/>
               </a:rPr>
-              <a:t>QR</a:t>
+              <a:t>의원 · 약국 이름</a:t>
             </a:r>
           </a:p>
         </p:txBody>

--- a/public/fun/cards/care/care-32.pptx
+++ b/public/fun/cards/care/care-32.pptx
@@ -3105,8 +3105,8 @@
         </p:nvSpPr>
         <p:spPr>
           <a:xfrm>
-            <a:off x="252000" y="144000"/>
-            <a:ext cx="201600" cy="21600"/>
+            <a:off x="0" y="0"/>
+            <a:ext cx="3240000" cy="36000"/>
           </a:xfrm>
           <a:prstGeom prst="rect">
             <a:avLst/>
@@ -3134,8 +3134,8 @@
         </p:nvSpPr>
         <p:spPr>
           <a:xfrm>
-            <a:off x="252000" y="273600"/>
-            <a:ext cx="2160000" cy="360000"/>
+            <a:off x="252000" y="223200"/>
+            <a:ext cx="1296000" cy="237600"/>
           </a:xfrm>
           <a:prstGeom prst="rect">
             <a:avLst/>
@@ -3150,11 +3150,11 @@
           <a:p>
             <a:pPr algn="l">
               <a:lnSpc>
-                <a:spcPts val="3190"/>
+                <a:spcPts val="1957"/>
               </a:lnSpc>
             </a:pPr>
             <a:r>
-              <a:rPr sz="2200" b="1">
+              <a:rPr sz="1350" b="1" spc="120">
                 <a:solidFill>
                   <a:srgbClr val="12151C"/>
                 </a:solidFill>
@@ -3174,8 +3174,8 @@
         </p:nvSpPr>
         <p:spPr>
           <a:xfrm>
-            <a:off x="252000" y="676800"/>
-            <a:ext cx="2160000" cy="171451"/>
+            <a:off x="252000" y="475200"/>
+            <a:ext cx="1296000" cy="133351"/>
           </a:xfrm>
           <a:prstGeom prst="rect">
             <a:avLst/>
@@ -3190,11 +3190,11 @@
           <a:p>
             <a:pPr algn="l">
               <a:lnSpc>
-                <a:spcPts val="1305"/>
+                <a:spcPts val="1015"/>
               </a:lnSpc>
             </a:pPr>
             <a:r>
-              <a:rPr sz="900" b="0">
+              <a:rPr sz="700" b="0">
                 <a:solidFill>
                   <a:srgbClr val="6B7280"/>
                 </a:solidFill>
@@ -3214,7 +3214,7 @@
         </p:nvSpPr>
         <p:spPr>
           <a:xfrm>
-            <a:off x="1548000" y="230400"/>
+            <a:off x="1548000" y="259200"/>
             <a:ext cx="1440000" cy="123826"/>
           </a:xfrm>
           <a:prstGeom prst="rect">
@@ -3234,7 +3234,7 @@
               </a:lnSpc>
             </a:pPr>
             <a:r>
-              <a:rPr sz="650" b="1" spc="200">
+              <a:rPr sz="650" b="1" spc="220">
                 <a:solidFill>
                   <a:srgbClr val="6B7280"/>
                 </a:solidFill>
@@ -3254,13 +3254,13 @@
         </p:nvCxnSpPr>
         <p:spPr>
           <a:xfrm>
-            <a:off x="252000" y="1051200"/>
+            <a:off x="252000" y="907200"/>
             <a:ext cx="2736000" cy="0"/>
           </a:xfrm>
           <a:prstGeom prst="line">
             <a:avLst/>
           </a:prstGeom>
-          <a:ln w="5760">
+          <a:ln w="3600">
             <a:solidFill>
               <a:srgbClr val="E3E5E9"/>
             </a:solidFill>
@@ -3275,8 +3275,8 @@
         </p:nvSpPr>
         <p:spPr>
           <a:xfrm>
-            <a:off x="252000" y="1123200"/>
-            <a:ext cx="576000" cy="99061"/>
+            <a:off x="252000" y="986400"/>
+            <a:ext cx="576000" cy="91441"/>
           </a:xfrm>
           <a:prstGeom prst="rect">
             <a:avLst/>
@@ -3291,11 +3291,11 @@
           <a:p>
             <a:pPr algn="l">
               <a:lnSpc>
-                <a:spcPts val="754"/>
+                <a:spcPts val="696"/>
               </a:lnSpc>
             </a:pPr>
             <a:r>
-              <a:rPr sz="520" b="1" spc="150">
+              <a:rPr sz="480" b="1" spc="160">
                 <a:solidFill>
                   <a:srgbClr val="6B7280"/>
                 </a:solidFill>
@@ -3315,8 +3315,8 @@
         </p:nvSpPr>
         <p:spPr>
           <a:xfrm>
-            <a:off x="900000" y="1101600"/>
-            <a:ext cx="2088000" cy="142876"/>
+            <a:off x="936000" y="968400"/>
+            <a:ext cx="2052000" cy="133351"/>
           </a:xfrm>
           <a:prstGeom prst="rect">
             <a:avLst/>
@@ -3331,11 +3331,11 @@
           <a:p>
             <a:pPr algn="l">
               <a:lnSpc>
-                <a:spcPts val="1087"/>
+                <a:spcPts val="1015"/>
               </a:lnSpc>
             </a:pPr>
             <a:r>
-              <a:rPr sz="750" b="0">
+              <a:rPr sz="700" b="0">
                 <a:solidFill>
                   <a:srgbClr val="12151C"/>
                 </a:solidFill>
@@ -3355,13 +3355,13 @@
         </p:nvCxnSpPr>
         <p:spPr>
           <a:xfrm>
-            <a:off x="252000" y="1274400"/>
+            <a:off x="252000" y="1137600"/>
             <a:ext cx="2736000" cy="0"/>
           </a:xfrm>
           <a:prstGeom prst="line">
             <a:avLst/>
           </a:prstGeom>
-          <a:ln w="5760">
+          <a:ln w="3600">
             <a:solidFill>
               <a:srgbClr val="E3E5E9"/>
             </a:solidFill>
@@ -3376,8 +3376,8 @@
         </p:nvSpPr>
         <p:spPr>
           <a:xfrm>
-            <a:off x="252000" y="1346400"/>
-            <a:ext cx="576000" cy="99061"/>
+            <a:off x="252000" y="1216800"/>
+            <a:ext cx="576000" cy="91441"/>
           </a:xfrm>
           <a:prstGeom prst="rect">
             <a:avLst/>
@@ -3392,11 +3392,11 @@
           <a:p>
             <a:pPr algn="l">
               <a:lnSpc>
-                <a:spcPts val="754"/>
+                <a:spcPts val="696"/>
               </a:lnSpc>
             </a:pPr>
             <a:r>
-              <a:rPr sz="520" b="1" spc="150">
+              <a:rPr sz="480" b="1" spc="160">
                 <a:solidFill>
                   <a:srgbClr val="6B7280"/>
                 </a:solidFill>
@@ -3416,8 +3416,8 @@
         </p:nvSpPr>
         <p:spPr>
           <a:xfrm>
-            <a:off x="900000" y="1324800"/>
-            <a:ext cx="2088000" cy="142876"/>
+            <a:off x="936000" y="1198800"/>
+            <a:ext cx="2052000" cy="133351"/>
           </a:xfrm>
           <a:prstGeom prst="rect">
             <a:avLst/>
@@ -3432,11 +3432,11 @@
           <a:p>
             <a:pPr algn="l">
               <a:lnSpc>
-                <a:spcPts val="1087"/>
+                <a:spcPts val="1015"/>
               </a:lnSpc>
             </a:pPr>
             <a:r>
-              <a:rPr sz="750" b="0">
+              <a:rPr sz="700" b="0">
                 <a:solidFill>
                   <a:srgbClr val="12151C"/>
                 </a:solidFill>
@@ -3456,13 +3456,13 @@
         </p:nvCxnSpPr>
         <p:spPr>
           <a:xfrm>
-            <a:off x="252000" y="1497600"/>
+            <a:off x="252000" y="1368000"/>
             <a:ext cx="2736000" cy="0"/>
           </a:xfrm>
           <a:prstGeom prst="line">
             <a:avLst/>
           </a:prstGeom>
-          <a:ln w="5760">
+          <a:ln w="3600">
             <a:solidFill>
               <a:srgbClr val="E3E5E9"/>
             </a:solidFill>
@@ -3477,8 +3477,8 @@
         </p:nvSpPr>
         <p:spPr>
           <a:xfrm>
-            <a:off x="252000" y="1569600"/>
-            <a:ext cx="576000" cy="99061"/>
+            <a:off x="252000" y="1447200"/>
+            <a:ext cx="576000" cy="91441"/>
           </a:xfrm>
           <a:prstGeom prst="rect">
             <a:avLst/>
@@ -3493,11 +3493,11 @@
           <a:p>
             <a:pPr algn="l">
               <a:lnSpc>
-                <a:spcPts val="754"/>
+                <a:spcPts val="696"/>
               </a:lnSpc>
             </a:pPr>
             <a:r>
-              <a:rPr sz="520" b="1" spc="150">
+              <a:rPr sz="480" b="1" spc="160">
                 <a:solidFill>
                   <a:srgbClr val="6B7280"/>
                 </a:solidFill>
@@ -3517,8 +3517,8 @@
         </p:nvSpPr>
         <p:spPr>
           <a:xfrm>
-            <a:off x="900000" y="1548000"/>
-            <a:ext cx="2088000" cy="142876"/>
+            <a:off x="936000" y="1429200"/>
+            <a:ext cx="2052000" cy="133351"/>
           </a:xfrm>
           <a:prstGeom prst="rect">
             <a:avLst/>
@@ -3533,11 +3533,11 @@
           <a:p>
             <a:pPr algn="l">
               <a:lnSpc>
-                <a:spcPts val="1087"/>
+                <a:spcPts val="1015"/>
               </a:lnSpc>
             </a:pPr>
             <a:r>
-              <a:rPr sz="750" b="0">
+              <a:rPr sz="700" b="0">
                 <a:solidFill>
                   <a:srgbClr val="12151C"/>
                 </a:solidFill>
@@ -3557,13 +3557,13 @@
         </p:nvCxnSpPr>
         <p:spPr>
           <a:xfrm>
-            <a:off x="252000" y="1720800"/>
+            <a:off x="252000" y="1598400"/>
             <a:ext cx="2736000" cy="0"/>
           </a:xfrm>
           <a:prstGeom prst="line">
             <a:avLst/>
           </a:prstGeom>
-          <a:ln w="5760">
+          <a:ln w="3600">
             <a:solidFill>
               <a:srgbClr val="E3E5E9"/>
             </a:solidFill>
@@ -3596,22 +3596,477 @@
         <p:nvPr/>
       </p:nvGrpSpPr>
       <p:grpSpPr/>
-      <p:sp>
-        <p:nvSpPr>
-          <p:cNvPr id="2" name="Rectangle 1"/>
-          <p:cNvSpPr/>
+      <p:cxnSp>
+        <p:nvCxnSpPr>
+          <p:cNvPr id="2" name="Connector 1"/>
+          <p:cNvCxnSpPr/>
           <p:nvPr/>
-        </p:nvSpPr>
-        <p:spPr>
-          <a:xfrm>
-            <a:off x="2304000" y="504000"/>
-            <a:ext cx="684000" cy="684000"/>
+        </p:nvCxnSpPr>
+        <p:spPr>
+          <a:xfrm>
+            <a:off x="396000" y="360000"/>
+            <a:ext cx="0" cy="446400"/>
+          </a:xfrm>
+          <a:prstGeom prst="line">
+            <a:avLst/>
+          </a:prstGeom>
+          <a:ln w="5760">
+            <a:solidFill>
+              <a:srgbClr val="FF2E93"/>
+            </a:solidFill>
+          </a:ln>
+        </p:spPr>
+      </p:cxnSp>
+      <p:sp>
+        <p:nvSpPr>
+          <p:cNvPr id="3" name="텍스트"/>
+          <p:cNvSpPr txBox="1"/>
+          <p:nvPr/>
+        </p:nvSpPr>
+        <p:spPr>
+          <a:xfrm>
+            <a:off x="252000" y="187200"/>
+            <a:ext cx="1440000" cy="99061"/>
           </a:xfrm>
           <a:prstGeom prst="rect">
             <a:avLst/>
           </a:prstGeom>
           <a:noFill/>
-          <a:ln w="7200">
+        </p:spPr>
+        <p:txBody>
+          <a:bodyPr wrap="square" lIns="0" rIns="0" tIns="0" bIns="0" anchor="t">
+            <a:spAutoFit/>
+          </a:bodyPr>
+          <a:lstStyle/>
+          <a:p>
+            <a:pPr algn="l">
+              <a:lnSpc>
+                <a:spcPts val="754"/>
+              </a:lnSpc>
+            </a:pPr>
+            <a:r>
+              <a:rPr sz="520" b="1" spc="240">
+                <a:solidFill>
+                  <a:srgbClr val="A3A9B5"/>
+                </a:solidFill>
+                <a:latin typeface="맑은 고딕"/>
+                <a:ea typeface="맑은 고딕"/>
+              </a:rPr>
+              <a:t>진료 · 상담</a:t>
+            </a:r>
+          </a:p>
+        </p:txBody>
+      </p:sp>
+      <p:sp>
+        <p:nvSpPr>
+          <p:cNvPr id="4" name="Oval 3"/>
+          <p:cNvSpPr/>
+          <p:nvPr/>
+        </p:nvSpPr>
+        <p:spPr>
+          <a:xfrm>
+            <a:off x="367200" y="374400"/>
+            <a:ext cx="57600" cy="57600"/>
+          </a:xfrm>
+          <a:prstGeom prst="ellipse">
+            <a:avLst/>
+          </a:prstGeom>
+          <a:solidFill>
+            <a:srgbClr val="FF2E93"/>
+          </a:solidFill>
+          <a:ln w="5760">
+            <a:solidFill>
+              <a:srgbClr val="FF2E93"/>
+            </a:solidFill>
+          </a:ln>
+        </p:spPr>
+        <p:txBody>
+          <a:bodyPr rtlCol="0" anchor="ctr"/>
+          <a:lstStyle/>
+          <a:p>
+            <a:pPr algn="ctr"/>
+          </a:p>
+        </p:txBody>
+      </p:sp>
+      <p:sp>
+        <p:nvSpPr>
+          <p:cNvPr id="5" name="텍스트"/>
+          <p:cNvSpPr txBox="1"/>
+          <p:nvPr/>
+        </p:nvSpPr>
+        <p:spPr>
+          <a:xfrm>
+            <a:off x="540000" y="331200"/>
+            <a:ext cx="1512000" cy="158400"/>
+          </a:xfrm>
+          <a:prstGeom prst="rect">
+            <a:avLst/>
+          </a:prstGeom>
+          <a:noFill/>
+        </p:spPr>
+        <p:txBody>
+          <a:bodyPr wrap="square" lIns="0" rIns="0" tIns="0" bIns="0" anchor="t">
+            <a:spAutoFit/>
+          </a:bodyPr>
+          <a:lstStyle/>
+          <a:p>
+            <a:pPr algn="l">
+              <a:lnSpc>
+                <a:spcPts val="1073"/>
+              </a:lnSpc>
+            </a:pPr>
+            <a:r>
+              <a:rPr sz="740" b="1">
+                <a:solidFill>
+                  <a:srgbClr val="FFFFFF"/>
+                </a:solidFill>
+                <a:latin typeface="맑은 고딕"/>
+                <a:ea typeface="맑은 고딕"/>
+              </a:rPr>
+              <a:t>예방 접종</a:t>
+            </a:r>
+          </a:p>
+        </p:txBody>
+      </p:sp>
+      <p:sp>
+        <p:nvSpPr>
+          <p:cNvPr id="6" name="Oval 5"/>
+          <p:cNvSpPr/>
+          <p:nvPr/>
+        </p:nvSpPr>
+        <p:spPr>
+          <a:xfrm>
+            <a:off x="367200" y="597600"/>
+            <a:ext cx="57600" cy="57600"/>
+          </a:xfrm>
+          <a:prstGeom prst="ellipse">
+            <a:avLst/>
+          </a:prstGeom>
+          <a:solidFill>
+            <a:srgbClr val="0E1116"/>
+          </a:solidFill>
+          <a:ln w="5760">
+            <a:solidFill>
+              <a:srgbClr val="FF2E93"/>
+            </a:solidFill>
+          </a:ln>
+        </p:spPr>
+        <p:txBody>
+          <a:bodyPr rtlCol="0" anchor="ctr"/>
+          <a:lstStyle/>
+          <a:p>
+            <a:pPr algn="ctr"/>
+          </a:p>
+        </p:txBody>
+      </p:sp>
+      <p:sp>
+        <p:nvSpPr>
+          <p:cNvPr id="7" name="텍스트"/>
+          <p:cNvSpPr txBox="1"/>
+          <p:nvPr/>
+        </p:nvSpPr>
+        <p:spPr>
+          <a:xfrm>
+            <a:off x="540000" y="554400"/>
+            <a:ext cx="1512000" cy="158400"/>
+          </a:xfrm>
+          <a:prstGeom prst="rect">
+            <a:avLst/>
+          </a:prstGeom>
+          <a:noFill/>
+        </p:spPr>
+        <p:txBody>
+          <a:bodyPr wrap="square" lIns="0" rIns="0" tIns="0" bIns="0" anchor="t">
+            <a:spAutoFit/>
+          </a:bodyPr>
+          <a:lstStyle/>
+          <a:p>
+            <a:pPr algn="l">
+              <a:lnSpc>
+                <a:spcPts val="1073"/>
+              </a:lnSpc>
+            </a:pPr>
+            <a:r>
+              <a:rPr sz="740" b="1">
+                <a:solidFill>
+                  <a:srgbClr val="FFFFFF"/>
+                </a:solidFill>
+                <a:latin typeface="맑은 고딕"/>
+                <a:ea typeface="맑은 고딕"/>
+              </a:rPr>
+              <a:t>한방 치료</a:t>
+            </a:r>
+          </a:p>
+        </p:txBody>
+      </p:sp>
+      <p:sp>
+        <p:nvSpPr>
+          <p:cNvPr id="8" name="Oval 7"/>
+          <p:cNvSpPr/>
+          <p:nvPr/>
+        </p:nvSpPr>
+        <p:spPr>
+          <a:xfrm>
+            <a:off x="367200" y="820800"/>
+            <a:ext cx="57600" cy="57600"/>
+          </a:xfrm>
+          <a:prstGeom prst="ellipse">
+            <a:avLst/>
+          </a:prstGeom>
+          <a:solidFill>
+            <a:srgbClr val="0E1116"/>
+          </a:solidFill>
+          <a:ln w="5760">
+            <a:solidFill>
+              <a:srgbClr val="FF2E93"/>
+            </a:solidFill>
+          </a:ln>
+        </p:spPr>
+        <p:txBody>
+          <a:bodyPr rtlCol="0" anchor="ctr"/>
+          <a:lstStyle/>
+          <a:p>
+            <a:pPr algn="ctr"/>
+          </a:p>
+        </p:txBody>
+      </p:sp>
+      <p:sp>
+        <p:nvSpPr>
+          <p:cNvPr id="9" name="텍스트"/>
+          <p:cNvSpPr txBox="1"/>
+          <p:nvPr/>
+        </p:nvSpPr>
+        <p:spPr>
+          <a:xfrm>
+            <a:off x="540000" y="777600"/>
+            <a:ext cx="1512000" cy="158400"/>
+          </a:xfrm>
+          <a:prstGeom prst="rect">
+            <a:avLst/>
+          </a:prstGeom>
+          <a:noFill/>
+        </p:spPr>
+        <p:txBody>
+          <a:bodyPr wrap="square" lIns="0" rIns="0" tIns="0" bIns="0" anchor="t">
+            <a:spAutoFit/>
+          </a:bodyPr>
+          <a:lstStyle/>
+          <a:p>
+            <a:pPr algn="l">
+              <a:lnSpc>
+                <a:spcPts val="1073"/>
+              </a:lnSpc>
+            </a:pPr>
+            <a:r>
+              <a:rPr sz="740" b="1">
+                <a:solidFill>
+                  <a:srgbClr val="FFFFFF"/>
+                </a:solidFill>
+                <a:latin typeface="맑은 고딕"/>
+                <a:ea typeface="맑은 고딕"/>
+              </a:rPr>
+              <a:t>침 · 뜸</a:t>
+            </a:r>
+          </a:p>
+        </p:txBody>
+      </p:sp>
+      <p:cxnSp>
+        <p:nvCxnSpPr>
+          <p:cNvPr id="10" name="Connector 9"/>
+          <p:cNvCxnSpPr/>
+          <p:nvPr/>
+        </p:nvCxnSpPr>
+        <p:spPr>
+          <a:xfrm>
+            <a:off x="2232000" y="345600"/>
+            <a:ext cx="0" cy="1166400"/>
+          </a:xfrm>
+          <a:prstGeom prst="line">
+            <a:avLst/>
+          </a:prstGeom>
+          <a:ln w="3600">
+            <a:solidFill>
+              <a:srgbClr val="2A2F38"/>
+            </a:solidFill>
+          </a:ln>
+        </p:spPr>
+      </p:cxnSp>
+      <p:sp>
+        <p:nvSpPr>
+          <p:cNvPr id="11" name="텍스트"/>
+          <p:cNvSpPr txBox="1"/>
+          <p:nvPr/>
+        </p:nvSpPr>
+        <p:spPr>
+          <a:xfrm>
+            <a:off x="2376000" y="396000"/>
+            <a:ext cx="648000" cy="91441"/>
+          </a:xfrm>
+          <a:prstGeom prst="rect">
+            <a:avLst/>
+          </a:prstGeom>
+          <a:noFill/>
+        </p:spPr>
+        <p:txBody>
+          <a:bodyPr wrap="square" lIns="0" rIns="0" tIns="0" bIns="0" anchor="t">
+            <a:spAutoFit/>
+          </a:bodyPr>
+          <a:lstStyle/>
+          <a:p>
+            <a:pPr algn="l">
+              <a:lnSpc>
+                <a:spcPts val="696"/>
+              </a:lnSpc>
+            </a:pPr>
+            <a:r>
+              <a:rPr sz="480" b="1" spc="140">
+                <a:solidFill>
+                  <a:srgbClr val="A3A9B5"/>
+                </a:solidFill>
+                <a:latin typeface="맑은 고딕"/>
+                <a:ea typeface="맑은 고딕"/>
+              </a:rPr>
+              <a:t>HOURS</a:t>
+            </a:r>
+          </a:p>
+        </p:txBody>
+      </p:sp>
+      <p:sp>
+        <p:nvSpPr>
+          <p:cNvPr id="12" name="텍스트"/>
+          <p:cNvSpPr txBox="1"/>
+          <p:nvPr/>
+        </p:nvSpPr>
+        <p:spPr>
+          <a:xfrm>
+            <a:off x="2376000" y="511200"/>
+            <a:ext cx="720000" cy="118111"/>
+          </a:xfrm>
+          <a:prstGeom prst="rect">
+            <a:avLst/>
+          </a:prstGeom>
+          <a:noFill/>
+        </p:spPr>
+        <p:txBody>
+          <a:bodyPr wrap="square" lIns="0" rIns="0" tIns="0" bIns="0" anchor="t">
+            <a:spAutoFit/>
+          </a:bodyPr>
+          <a:lstStyle/>
+          <a:p>
+            <a:pPr algn="l">
+              <a:lnSpc>
+                <a:spcPts val="899"/>
+              </a:lnSpc>
+            </a:pPr>
+            <a:r>
+              <a:rPr sz="620" b="0">
+                <a:solidFill>
+                  <a:srgbClr val="FFFFFF"/>
+                </a:solidFill>
+                <a:latin typeface="맑은 고딕"/>
+                <a:ea typeface="맑은 고딕"/>
+              </a:rPr>
+              <a:t>평일 09:00 – 18:00</a:t>
+            </a:r>
+          </a:p>
+        </p:txBody>
+      </p:sp>
+      <p:sp>
+        <p:nvSpPr>
+          <p:cNvPr id="13" name="텍스트"/>
+          <p:cNvSpPr txBox="1"/>
+          <p:nvPr/>
+        </p:nvSpPr>
+        <p:spPr>
+          <a:xfrm>
+            <a:off x="2376000" y="835200"/>
+            <a:ext cx="648000" cy="91441"/>
+          </a:xfrm>
+          <a:prstGeom prst="rect">
+            <a:avLst/>
+          </a:prstGeom>
+          <a:noFill/>
+        </p:spPr>
+        <p:txBody>
+          <a:bodyPr wrap="square" lIns="0" rIns="0" tIns="0" bIns="0" anchor="t">
+            <a:spAutoFit/>
+          </a:bodyPr>
+          <a:lstStyle/>
+          <a:p>
+            <a:pPr algn="l">
+              <a:lnSpc>
+                <a:spcPts val="696"/>
+              </a:lnSpc>
+            </a:pPr>
+            <a:r>
+              <a:rPr sz="480" b="1" spc="140">
+                <a:solidFill>
+                  <a:srgbClr val="A3A9B5"/>
+                </a:solidFill>
+                <a:latin typeface="맑은 고딕"/>
+                <a:ea typeface="맑은 고딕"/>
+              </a:rPr>
+              <a:t>BLOG</a:t>
+            </a:r>
+          </a:p>
+        </p:txBody>
+      </p:sp>
+      <p:sp>
+        <p:nvSpPr>
+          <p:cNvPr id="14" name="텍스트"/>
+          <p:cNvSpPr txBox="1"/>
+          <p:nvPr/>
+        </p:nvSpPr>
+        <p:spPr>
+          <a:xfrm>
+            <a:off x="2376000" y="950400"/>
+            <a:ext cx="684000" cy="118111"/>
+          </a:xfrm>
+          <a:prstGeom prst="rect">
+            <a:avLst/>
+          </a:prstGeom>
+          <a:noFill/>
+        </p:spPr>
+        <p:txBody>
+          <a:bodyPr wrap="square" lIns="0" rIns="0" tIns="0" bIns="0" anchor="t">
+            <a:spAutoFit/>
+          </a:bodyPr>
+          <a:lstStyle/>
+          <a:p>
+            <a:pPr algn="l">
+              <a:lnSpc>
+                <a:spcPts val="899"/>
+              </a:lnSpc>
+            </a:pPr>
+            <a:r>
+              <a:rPr sz="620" b="0">
+                <a:solidFill>
+                  <a:srgbClr val="FFFFFF"/>
+                </a:solidFill>
+                <a:latin typeface="맑은 고딕"/>
+                <a:ea typeface="맑은 고딕"/>
+              </a:rPr>
+              <a:t>blog.example.com</a:t>
+            </a:r>
+          </a:p>
+        </p:txBody>
+      </p:sp>
+      <p:sp>
+        <p:nvSpPr>
+          <p:cNvPr id="15" name="Rectangle 14"/>
+          <p:cNvSpPr/>
+          <p:nvPr/>
+        </p:nvSpPr>
+        <p:spPr>
+          <a:xfrm>
+            <a:off x="2376000" y="1224000"/>
+            <a:ext cx="237600" cy="237600"/>
+          </a:xfrm>
+          <a:prstGeom prst="rect">
+            <a:avLst/>
+          </a:prstGeom>
+          <a:noFill/>
+          <a:ln w="4320">
             <a:solidFill>
               <a:srgbClr val="A3A9B5"/>
             </a:solidFill>
@@ -3628,14 +4083,14 @@
       </p:sp>
       <p:sp>
         <p:nvSpPr>
-          <p:cNvPr id="3" name="텍스트"/>
+          <p:cNvPr id="16" name="텍스트"/>
           <p:cNvSpPr txBox="1"/>
           <p:nvPr/>
         </p:nvSpPr>
         <p:spPr>
           <a:xfrm>
-            <a:off x="2304000" y="504000"/>
-            <a:ext cx="684000" cy="684000"/>
+            <a:off x="2376000" y="1224000"/>
+            <a:ext cx="237600" cy="237600"/>
           </a:xfrm>
           <a:prstGeom prst="rect">
             <a:avLst/>
@@ -3650,11 +4105,11 @@
           <a:p>
             <a:pPr algn="ctr">
               <a:lnSpc>
-                <a:spcPts val="1595"/>
+                <a:spcPts val="725"/>
               </a:lnSpc>
             </a:pPr>
             <a:r>
-              <a:rPr sz="1100" b="1">
+              <a:rPr sz="500" b="1">
                 <a:solidFill>
                   <a:srgbClr val="A3A9B5"/>
                 </a:solidFill>
@@ -3662,132 +4117,6 @@
                 <a:ea typeface="맑은 고딕"/>
               </a:rPr>
               <a:t>QR</a:t>
-            </a:r>
-          </a:p>
-        </p:txBody>
-      </p:sp>
-      <p:sp>
-        <p:nvSpPr>
-          <p:cNvPr id="4" name="텍스트"/>
-          <p:cNvSpPr txBox="1"/>
-          <p:nvPr/>
-        </p:nvSpPr>
-        <p:spPr>
-          <a:xfrm>
-            <a:off x="252000" y="504000"/>
-            <a:ext cx="1728000" cy="720000"/>
-          </a:xfrm>
-          <a:prstGeom prst="rect">
-            <a:avLst/>
-          </a:prstGeom>
-          <a:noFill/>
-        </p:spPr>
-        <p:txBody>
-          <a:bodyPr wrap="square" lIns="0" rIns="0" tIns="0" bIns="0" anchor="t">
-            <a:spAutoFit/>
-          </a:bodyPr>
-          <a:lstStyle/>
-          <a:p>
-            <a:pPr algn="l">
-              <a:lnSpc>
-                <a:spcPts val="1739"/>
-              </a:lnSpc>
-            </a:pPr>
-            <a:r>
-              <a:rPr sz="1200" b="1">
-                <a:solidFill>
-                  <a:srgbClr val="FFFFFF"/>
-                </a:solidFill>
-                <a:latin typeface="맑은 고딕"/>
-                <a:ea typeface="맑은 고딕"/>
-              </a:rPr>
-              <a:t>어르신의 이야기에</a:t>
-            </a:r>
-          </a:p>
-          <a:p>
-            <a:pPr algn="l">
-              <a:lnSpc>
-                <a:spcPts val="1739"/>
-              </a:lnSpc>
-            </a:pPr>
-            <a:r>
-              <a:rPr sz="1200" b="1">
-                <a:solidFill>
-                  <a:srgbClr val="FFFFFF"/>
-                </a:solidFill>
-                <a:latin typeface="맑은 고딕"/>
-                <a:ea typeface="맑은 고딕"/>
-              </a:rPr>
-              <a:t>귀 기울입니다</a:t>
-            </a:r>
-          </a:p>
-        </p:txBody>
-      </p:sp>
-      <p:sp>
-        <p:nvSpPr>
-          <p:cNvPr id="5" name="Rectangle 4"/>
-          <p:cNvSpPr/>
-          <p:nvPr/>
-        </p:nvSpPr>
-        <p:spPr>
-          <a:xfrm>
-            <a:off x="252000" y="1296000"/>
-            <a:ext cx="144000" cy="18000"/>
-          </a:xfrm>
-          <a:prstGeom prst="rect">
-            <a:avLst/>
-          </a:prstGeom>
-          <a:solidFill>
-            <a:srgbClr val="FF2E93"/>
-          </a:solidFill>
-          <a:ln>
-            <a:noFill/>
-          </a:ln>
-        </p:spPr>
-        <p:txBody>
-          <a:bodyPr rtlCol="0" anchor="ctr"/>
-          <a:lstStyle/>
-          <a:p>
-            <a:pPr algn="ctr"/>
-          </a:p>
-        </p:txBody>
-      </p:sp>
-      <p:sp>
-        <p:nvSpPr>
-          <p:cNvPr id="6" name="텍스트"/>
-          <p:cNvSpPr txBox="1"/>
-          <p:nvPr/>
-        </p:nvSpPr>
-        <p:spPr>
-          <a:xfrm>
-            <a:off x="252000" y="1404000"/>
-            <a:ext cx="1656000" cy="133351"/>
-          </a:xfrm>
-          <a:prstGeom prst="rect">
-            <a:avLst/>
-          </a:prstGeom>
-          <a:noFill/>
-        </p:spPr>
-        <p:txBody>
-          <a:bodyPr wrap="square" lIns="0" rIns="0" tIns="0" bIns="0" anchor="t">
-            <a:spAutoFit/>
-          </a:bodyPr>
-          <a:lstStyle/>
-          <a:p>
-            <a:pPr algn="l">
-              <a:lnSpc>
-                <a:spcPts val="1015"/>
-              </a:lnSpc>
-            </a:pPr>
-            <a:r>
-              <a:rPr sz="700" b="1" spc="200">
-                <a:solidFill>
-                  <a:srgbClr val="A3A9B5"/>
-                </a:solidFill>
-                <a:latin typeface="맑은 고딕"/>
-                <a:ea typeface="맑은 고딕"/>
-              </a:rPr>
-              <a:t>의원 · 약국 이름</a:t>
             </a:r>
           </a:p>
         </p:txBody>
